--- a/歌頌復活主_歡樂主作王.pptx
+++ b/歌頌復活主_歡樂主作王.pptx
@@ -113,6 +113,11 @@
       </a:defRPr>
     </a:lvl9pPr>
   </p:defaultTextStyle>
+  <p:extLst>
+    <p:ext uri="{EFAFB233-063F-42B5-8137-9DF3F51BA10A}">
+      <p15:sldGuideLst xmlns:p15="http://schemas.microsoft.com/office/powerpoint/2012/main"/>
+    </p:ext>
+  </p:extLst>
 </p:presentation>
 </file>
 
@@ -154,7 +159,7 @@
           <a:lstStyle/>
           <a:p>
             <a:r>
-              <a:rPr lang="en-US" altLang="zh-TW" smtClean="0"/>
+              <a:rPr lang="en-US" altLang="zh-TW"/>
               <a:t>Click to edit Master title style</a:t>
             </a:r>
             <a:endParaRPr lang="zh-TW" altLang="en-US"/>
@@ -273,7 +278,7 @@
           </a:lstStyle>
           <a:p>
             <a:r>
-              <a:rPr lang="en-US" altLang="zh-TW" smtClean="0"/>
+              <a:rPr lang="en-US" altLang="zh-TW"/>
               <a:t>Click to edit Master subtitle style</a:t>
             </a:r>
             <a:endParaRPr lang="zh-TW" altLang="en-US"/>
@@ -297,7 +302,7 @@
           <a:p>
             <a:fld id="{343C6577-0C61-46BC-BF08-CE1B1D6A50DA}" type="datetimeFigureOut">
               <a:rPr lang="vi-VN" smtClean="0"/>
-              <a:t>08/04/2023</a:t>
+              <a:t>30/03/2024</a:t>
             </a:fld>
             <a:endParaRPr lang="vi-VN"/>
           </a:p>
@@ -391,7 +396,7 @@
           <a:lstStyle/>
           <a:p>
             <a:r>
-              <a:rPr lang="en-US" altLang="zh-TW" smtClean="0"/>
+              <a:rPr lang="en-US" altLang="zh-TW"/>
               <a:t>Click to edit Master title style</a:t>
             </a:r>
             <a:endParaRPr lang="zh-TW" altLang="en-US"/>
@@ -415,35 +420,35 @@
           <a:p>
             <a:pPr lvl="0"/>
             <a:r>
-              <a:rPr lang="en-US" altLang="zh-TW" smtClean="0"/>
+              <a:rPr lang="en-US" altLang="zh-TW"/>
               <a:t>Edit Master text styles</a:t>
             </a:r>
           </a:p>
           <a:p>
             <a:pPr lvl="1"/>
             <a:r>
-              <a:rPr lang="en-US" altLang="zh-TW" smtClean="0"/>
+              <a:rPr lang="en-US" altLang="zh-TW"/>
               <a:t>Second level</a:t>
             </a:r>
           </a:p>
           <a:p>
             <a:pPr lvl="2"/>
             <a:r>
-              <a:rPr lang="en-US" altLang="zh-TW" smtClean="0"/>
+              <a:rPr lang="en-US" altLang="zh-TW"/>
               <a:t>Third level</a:t>
             </a:r>
           </a:p>
           <a:p>
             <a:pPr lvl="3"/>
             <a:r>
-              <a:rPr lang="en-US" altLang="zh-TW" smtClean="0"/>
+              <a:rPr lang="en-US" altLang="zh-TW"/>
               <a:t>Fourth level</a:t>
             </a:r>
           </a:p>
           <a:p>
             <a:pPr lvl="4"/>
             <a:r>
-              <a:rPr lang="en-US" altLang="zh-TW" smtClean="0"/>
+              <a:rPr lang="en-US" altLang="zh-TW"/>
               <a:t>Fifth level</a:t>
             </a:r>
             <a:endParaRPr lang="zh-TW" altLang="en-US"/>
@@ -467,7 +472,7 @@
           <a:p>
             <a:fld id="{343C6577-0C61-46BC-BF08-CE1B1D6A50DA}" type="datetimeFigureOut">
               <a:rPr lang="vi-VN" smtClean="0"/>
-              <a:t>08/04/2023</a:t>
+              <a:t>30/03/2024</a:t>
             </a:fld>
             <a:endParaRPr lang="vi-VN"/>
           </a:p>
@@ -566,7 +571,7 @@
           <a:lstStyle/>
           <a:p>
             <a:r>
-              <a:rPr lang="en-US" altLang="zh-TW" smtClean="0"/>
+              <a:rPr lang="en-US" altLang="zh-TW"/>
               <a:t>Click to edit Master title style</a:t>
             </a:r>
             <a:endParaRPr lang="zh-TW" altLang="en-US"/>
@@ -595,35 +600,35 @@
           <a:p>
             <a:pPr lvl="0"/>
             <a:r>
-              <a:rPr lang="en-US" altLang="zh-TW" smtClean="0"/>
+              <a:rPr lang="en-US" altLang="zh-TW"/>
               <a:t>Edit Master text styles</a:t>
             </a:r>
           </a:p>
           <a:p>
             <a:pPr lvl="1"/>
             <a:r>
-              <a:rPr lang="en-US" altLang="zh-TW" smtClean="0"/>
+              <a:rPr lang="en-US" altLang="zh-TW"/>
               <a:t>Second level</a:t>
             </a:r>
           </a:p>
           <a:p>
             <a:pPr lvl="2"/>
             <a:r>
-              <a:rPr lang="en-US" altLang="zh-TW" smtClean="0"/>
+              <a:rPr lang="en-US" altLang="zh-TW"/>
               <a:t>Third level</a:t>
             </a:r>
           </a:p>
           <a:p>
             <a:pPr lvl="3"/>
             <a:r>
-              <a:rPr lang="en-US" altLang="zh-TW" smtClean="0"/>
+              <a:rPr lang="en-US" altLang="zh-TW"/>
               <a:t>Fourth level</a:t>
             </a:r>
           </a:p>
           <a:p>
             <a:pPr lvl="4"/>
             <a:r>
-              <a:rPr lang="en-US" altLang="zh-TW" smtClean="0"/>
+              <a:rPr lang="en-US" altLang="zh-TW"/>
               <a:t>Fifth level</a:t>
             </a:r>
             <a:endParaRPr lang="zh-TW" altLang="en-US"/>
@@ -647,7 +652,7 @@
           <a:p>
             <a:fld id="{343C6577-0C61-46BC-BF08-CE1B1D6A50DA}" type="datetimeFigureOut">
               <a:rPr lang="vi-VN" smtClean="0"/>
-              <a:t>08/04/2023</a:t>
+              <a:t>30/03/2024</a:t>
             </a:fld>
             <a:endParaRPr lang="vi-VN"/>
           </a:p>
@@ -741,7 +746,7 @@
           <a:lstStyle/>
           <a:p>
             <a:r>
-              <a:rPr lang="en-US" altLang="zh-TW" smtClean="0"/>
+              <a:rPr lang="en-US" altLang="zh-TW"/>
               <a:t>Click to edit Master title style</a:t>
             </a:r>
             <a:endParaRPr lang="zh-TW" altLang="en-US"/>
@@ -765,35 +770,35 @@
           <a:p>
             <a:pPr lvl="0"/>
             <a:r>
-              <a:rPr lang="en-US" altLang="zh-TW" smtClean="0"/>
+              <a:rPr lang="en-US" altLang="zh-TW"/>
               <a:t>Edit Master text styles</a:t>
             </a:r>
           </a:p>
           <a:p>
             <a:pPr lvl="1"/>
             <a:r>
-              <a:rPr lang="en-US" altLang="zh-TW" smtClean="0"/>
+              <a:rPr lang="en-US" altLang="zh-TW"/>
               <a:t>Second level</a:t>
             </a:r>
           </a:p>
           <a:p>
             <a:pPr lvl="2"/>
             <a:r>
-              <a:rPr lang="en-US" altLang="zh-TW" smtClean="0"/>
+              <a:rPr lang="en-US" altLang="zh-TW"/>
               <a:t>Third level</a:t>
             </a:r>
           </a:p>
           <a:p>
             <a:pPr lvl="3"/>
             <a:r>
-              <a:rPr lang="en-US" altLang="zh-TW" smtClean="0"/>
+              <a:rPr lang="en-US" altLang="zh-TW"/>
               <a:t>Fourth level</a:t>
             </a:r>
           </a:p>
           <a:p>
             <a:pPr lvl="4"/>
             <a:r>
-              <a:rPr lang="en-US" altLang="zh-TW" smtClean="0"/>
+              <a:rPr lang="en-US" altLang="zh-TW"/>
               <a:t>Fifth level</a:t>
             </a:r>
             <a:endParaRPr lang="zh-TW" altLang="en-US"/>
@@ -817,7 +822,7 @@
           <a:p>
             <a:fld id="{343C6577-0C61-46BC-BF08-CE1B1D6A50DA}" type="datetimeFigureOut">
               <a:rPr lang="vi-VN" smtClean="0"/>
-              <a:t>08/04/2023</a:t>
+              <a:t>30/03/2024</a:t>
             </a:fld>
             <a:endParaRPr lang="vi-VN"/>
           </a:p>
@@ -920,7 +925,7 @@
           </a:lstStyle>
           <a:p>
             <a:r>
-              <a:rPr lang="en-US" altLang="zh-TW" smtClean="0"/>
+              <a:rPr lang="en-US" altLang="zh-TW"/>
               <a:t>Click to edit Master title style</a:t>
             </a:r>
             <a:endParaRPr lang="zh-TW" altLang="en-US"/>
@@ -1040,7 +1045,7 @@
           <a:p>
             <a:pPr lvl="0"/>
             <a:r>
-              <a:rPr lang="en-US" altLang="zh-TW" smtClean="0"/>
+              <a:rPr lang="en-US" altLang="zh-TW"/>
               <a:t>Edit Master text styles</a:t>
             </a:r>
           </a:p>
@@ -1063,7 +1068,7 @@
           <a:p>
             <a:fld id="{343C6577-0C61-46BC-BF08-CE1B1D6A50DA}" type="datetimeFigureOut">
               <a:rPr lang="vi-VN" smtClean="0"/>
-              <a:t>08/04/2023</a:t>
+              <a:t>30/03/2024</a:t>
             </a:fld>
             <a:endParaRPr lang="vi-VN"/>
           </a:p>
@@ -1157,7 +1162,7 @@
           <a:lstStyle/>
           <a:p>
             <a:r>
-              <a:rPr lang="en-US" altLang="zh-TW" smtClean="0"/>
+              <a:rPr lang="en-US" altLang="zh-TW"/>
               <a:t>Click to edit Master title style</a:t>
             </a:r>
             <a:endParaRPr lang="zh-TW" altLang="en-US"/>
@@ -1214,35 +1219,35 @@
           <a:p>
             <a:pPr lvl="0"/>
             <a:r>
-              <a:rPr lang="en-US" altLang="zh-TW" smtClean="0"/>
+              <a:rPr lang="en-US" altLang="zh-TW"/>
               <a:t>Edit Master text styles</a:t>
             </a:r>
           </a:p>
           <a:p>
             <a:pPr lvl="1"/>
             <a:r>
-              <a:rPr lang="en-US" altLang="zh-TW" smtClean="0"/>
+              <a:rPr lang="en-US" altLang="zh-TW"/>
               <a:t>Second level</a:t>
             </a:r>
           </a:p>
           <a:p>
             <a:pPr lvl="2"/>
             <a:r>
-              <a:rPr lang="en-US" altLang="zh-TW" smtClean="0"/>
+              <a:rPr lang="en-US" altLang="zh-TW"/>
               <a:t>Third level</a:t>
             </a:r>
           </a:p>
           <a:p>
             <a:pPr lvl="3"/>
             <a:r>
-              <a:rPr lang="en-US" altLang="zh-TW" smtClean="0"/>
+              <a:rPr lang="en-US" altLang="zh-TW"/>
               <a:t>Fourth level</a:t>
             </a:r>
           </a:p>
           <a:p>
             <a:pPr lvl="4"/>
             <a:r>
-              <a:rPr lang="en-US" altLang="zh-TW" smtClean="0"/>
+              <a:rPr lang="en-US" altLang="zh-TW"/>
               <a:t>Fifth level</a:t>
             </a:r>
             <a:endParaRPr lang="zh-TW" altLang="en-US"/>
@@ -1299,35 +1304,35 @@
           <a:p>
             <a:pPr lvl="0"/>
             <a:r>
-              <a:rPr lang="en-US" altLang="zh-TW" smtClean="0"/>
+              <a:rPr lang="en-US" altLang="zh-TW"/>
               <a:t>Edit Master text styles</a:t>
             </a:r>
           </a:p>
           <a:p>
             <a:pPr lvl="1"/>
             <a:r>
-              <a:rPr lang="en-US" altLang="zh-TW" smtClean="0"/>
+              <a:rPr lang="en-US" altLang="zh-TW"/>
               <a:t>Second level</a:t>
             </a:r>
           </a:p>
           <a:p>
             <a:pPr lvl="2"/>
             <a:r>
-              <a:rPr lang="en-US" altLang="zh-TW" smtClean="0"/>
+              <a:rPr lang="en-US" altLang="zh-TW"/>
               <a:t>Third level</a:t>
             </a:r>
           </a:p>
           <a:p>
             <a:pPr lvl="3"/>
             <a:r>
-              <a:rPr lang="en-US" altLang="zh-TW" smtClean="0"/>
+              <a:rPr lang="en-US" altLang="zh-TW"/>
               <a:t>Fourth level</a:t>
             </a:r>
           </a:p>
           <a:p>
             <a:pPr lvl="4"/>
             <a:r>
-              <a:rPr lang="en-US" altLang="zh-TW" smtClean="0"/>
+              <a:rPr lang="en-US" altLang="zh-TW"/>
               <a:t>Fifth level</a:t>
             </a:r>
             <a:endParaRPr lang="zh-TW" altLang="en-US"/>
@@ -1351,7 +1356,7 @@
           <a:p>
             <a:fld id="{343C6577-0C61-46BC-BF08-CE1B1D6A50DA}" type="datetimeFigureOut">
               <a:rPr lang="vi-VN" smtClean="0"/>
-              <a:t>08/04/2023</a:t>
+              <a:t>30/03/2024</a:t>
             </a:fld>
             <a:endParaRPr lang="vi-VN"/>
           </a:p>
@@ -1449,7 +1454,7 @@
           </a:lstStyle>
           <a:p>
             <a:r>
-              <a:rPr lang="en-US" altLang="zh-TW" smtClean="0"/>
+              <a:rPr lang="en-US" altLang="zh-TW"/>
               <a:t>Click to edit Master title style</a:t>
             </a:r>
             <a:endParaRPr lang="zh-TW" altLang="en-US"/>
@@ -1515,7 +1520,7 @@
           <a:p>
             <a:pPr lvl="0"/>
             <a:r>
-              <a:rPr lang="en-US" altLang="zh-TW" smtClean="0"/>
+              <a:rPr lang="en-US" altLang="zh-TW"/>
               <a:t>Edit Master text styles</a:t>
             </a:r>
           </a:p>
@@ -1571,35 +1576,35 @@
           <a:p>
             <a:pPr lvl="0"/>
             <a:r>
-              <a:rPr lang="en-US" altLang="zh-TW" smtClean="0"/>
+              <a:rPr lang="en-US" altLang="zh-TW"/>
               <a:t>Edit Master text styles</a:t>
             </a:r>
           </a:p>
           <a:p>
             <a:pPr lvl="1"/>
             <a:r>
-              <a:rPr lang="en-US" altLang="zh-TW" smtClean="0"/>
+              <a:rPr lang="en-US" altLang="zh-TW"/>
               <a:t>Second level</a:t>
             </a:r>
           </a:p>
           <a:p>
             <a:pPr lvl="2"/>
             <a:r>
-              <a:rPr lang="en-US" altLang="zh-TW" smtClean="0"/>
+              <a:rPr lang="en-US" altLang="zh-TW"/>
               <a:t>Third level</a:t>
             </a:r>
           </a:p>
           <a:p>
             <a:pPr lvl="3"/>
             <a:r>
-              <a:rPr lang="en-US" altLang="zh-TW" smtClean="0"/>
+              <a:rPr lang="en-US" altLang="zh-TW"/>
               <a:t>Fourth level</a:t>
             </a:r>
           </a:p>
           <a:p>
             <a:pPr lvl="4"/>
             <a:r>
-              <a:rPr lang="en-US" altLang="zh-TW" smtClean="0"/>
+              <a:rPr lang="en-US" altLang="zh-TW"/>
               <a:t>Fifth level</a:t>
             </a:r>
             <a:endParaRPr lang="zh-TW" altLang="en-US"/>
@@ -1665,7 +1670,7 @@
           <a:p>
             <a:pPr lvl="0"/>
             <a:r>
-              <a:rPr lang="en-US" altLang="zh-TW" smtClean="0"/>
+              <a:rPr lang="en-US" altLang="zh-TW"/>
               <a:t>Edit Master text styles</a:t>
             </a:r>
           </a:p>
@@ -1721,35 +1726,35 @@
           <a:p>
             <a:pPr lvl="0"/>
             <a:r>
-              <a:rPr lang="en-US" altLang="zh-TW" smtClean="0"/>
+              <a:rPr lang="en-US" altLang="zh-TW"/>
               <a:t>Edit Master text styles</a:t>
             </a:r>
           </a:p>
           <a:p>
             <a:pPr lvl="1"/>
             <a:r>
-              <a:rPr lang="en-US" altLang="zh-TW" smtClean="0"/>
+              <a:rPr lang="en-US" altLang="zh-TW"/>
               <a:t>Second level</a:t>
             </a:r>
           </a:p>
           <a:p>
             <a:pPr lvl="2"/>
             <a:r>
-              <a:rPr lang="en-US" altLang="zh-TW" smtClean="0"/>
+              <a:rPr lang="en-US" altLang="zh-TW"/>
               <a:t>Third level</a:t>
             </a:r>
           </a:p>
           <a:p>
             <a:pPr lvl="3"/>
             <a:r>
-              <a:rPr lang="en-US" altLang="zh-TW" smtClean="0"/>
+              <a:rPr lang="en-US" altLang="zh-TW"/>
               <a:t>Fourth level</a:t>
             </a:r>
           </a:p>
           <a:p>
             <a:pPr lvl="4"/>
             <a:r>
-              <a:rPr lang="en-US" altLang="zh-TW" smtClean="0"/>
+              <a:rPr lang="en-US" altLang="zh-TW"/>
               <a:t>Fifth level</a:t>
             </a:r>
             <a:endParaRPr lang="zh-TW" altLang="en-US"/>
@@ -1773,7 +1778,7 @@
           <a:p>
             <a:fld id="{343C6577-0C61-46BC-BF08-CE1B1D6A50DA}" type="datetimeFigureOut">
               <a:rPr lang="vi-VN" smtClean="0"/>
-              <a:t>08/04/2023</a:t>
+              <a:t>30/03/2024</a:t>
             </a:fld>
             <a:endParaRPr lang="vi-VN"/>
           </a:p>
@@ -1867,7 +1872,7 @@
           <a:lstStyle/>
           <a:p>
             <a:r>
-              <a:rPr lang="en-US" altLang="zh-TW" smtClean="0"/>
+              <a:rPr lang="en-US" altLang="zh-TW"/>
               <a:t>Click to edit Master title style</a:t>
             </a:r>
             <a:endParaRPr lang="zh-TW" altLang="en-US"/>
@@ -1891,7 +1896,7 @@
           <a:p>
             <a:fld id="{343C6577-0C61-46BC-BF08-CE1B1D6A50DA}" type="datetimeFigureOut">
               <a:rPr lang="vi-VN" smtClean="0"/>
-              <a:t>08/04/2023</a:t>
+              <a:t>30/03/2024</a:t>
             </a:fld>
             <a:endParaRPr lang="vi-VN"/>
           </a:p>
@@ -1986,7 +1991,7 @@
           <a:p>
             <a:fld id="{343C6577-0C61-46BC-BF08-CE1B1D6A50DA}" type="datetimeFigureOut">
               <a:rPr lang="vi-VN" smtClean="0"/>
-              <a:t>08/04/2023</a:t>
+              <a:t>30/03/2024</a:t>
             </a:fld>
             <a:endParaRPr lang="vi-VN"/>
           </a:p>
@@ -2089,7 +2094,7 @@
           </a:lstStyle>
           <a:p>
             <a:r>
-              <a:rPr lang="en-US" altLang="zh-TW" smtClean="0"/>
+              <a:rPr lang="en-US" altLang="zh-TW"/>
               <a:t>Click to edit Master title style</a:t>
             </a:r>
             <a:endParaRPr lang="zh-TW" altLang="en-US"/>
@@ -2146,35 +2151,35 @@
           <a:p>
             <a:pPr lvl="0"/>
             <a:r>
-              <a:rPr lang="en-US" altLang="zh-TW" smtClean="0"/>
+              <a:rPr lang="en-US" altLang="zh-TW"/>
               <a:t>Edit Master text styles</a:t>
             </a:r>
           </a:p>
           <a:p>
             <a:pPr lvl="1"/>
             <a:r>
-              <a:rPr lang="en-US" altLang="zh-TW" smtClean="0"/>
+              <a:rPr lang="en-US" altLang="zh-TW"/>
               <a:t>Second level</a:t>
             </a:r>
           </a:p>
           <a:p>
             <a:pPr lvl="2"/>
             <a:r>
-              <a:rPr lang="en-US" altLang="zh-TW" smtClean="0"/>
+              <a:rPr lang="en-US" altLang="zh-TW"/>
               <a:t>Third level</a:t>
             </a:r>
           </a:p>
           <a:p>
             <a:pPr lvl="3"/>
             <a:r>
-              <a:rPr lang="en-US" altLang="zh-TW" smtClean="0"/>
+              <a:rPr lang="en-US" altLang="zh-TW"/>
               <a:t>Fourth level</a:t>
             </a:r>
           </a:p>
           <a:p>
             <a:pPr lvl="4"/>
             <a:r>
-              <a:rPr lang="en-US" altLang="zh-TW" smtClean="0"/>
+              <a:rPr lang="en-US" altLang="zh-TW"/>
               <a:t>Fifth level</a:t>
             </a:r>
             <a:endParaRPr lang="zh-TW" altLang="en-US"/>
@@ -2240,7 +2245,7 @@
           <a:p>
             <a:pPr lvl="0"/>
             <a:r>
-              <a:rPr lang="en-US" altLang="zh-TW" smtClean="0"/>
+              <a:rPr lang="en-US" altLang="zh-TW"/>
               <a:t>Edit Master text styles</a:t>
             </a:r>
           </a:p>
@@ -2263,7 +2268,7 @@
           <a:p>
             <a:fld id="{343C6577-0C61-46BC-BF08-CE1B1D6A50DA}" type="datetimeFigureOut">
               <a:rPr lang="vi-VN" smtClean="0"/>
-              <a:t>08/04/2023</a:t>
+              <a:t>30/03/2024</a:t>
             </a:fld>
             <a:endParaRPr lang="vi-VN"/>
           </a:p>
@@ -2366,7 +2371,7 @@
           </a:lstStyle>
           <a:p>
             <a:r>
-              <a:rPr lang="en-US" altLang="zh-TW" smtClean="0"/>
+              <a:rPr lang="en-US" altLang="zh-TW"/>
               <a:t>Click to edit Master title style</a:t>
             </a:r>
             <a:endParaRPr lang="zh-TW" altLang="en-US"/>
@@ -2431,7 +2436,7 @@
           </a:lstStyle>
           <a:p>
             <a:r>
-              <a:rPr lang="en-US" altLang="zh-TW" smtClean="0"/>
+              <a:rPr lang="en-US" altLang="zh-TW"/>
               <a:t>Click icon to add picture</a:t>
             </a:r>
             <a:endParaRPr lang="zh-TW" altLang="en-US"/>
@@ -2497,7 +2502,7 @@
           <a:p>
             <a:pPr lvl="0"/>
             <a:r>
-              <a:rPr lang="en-US" altLang="zh-TW" smtClean="0"/>
+              <a:rPr lang="en-US" altLang="zh-TW"/>
               <a:t>Edit Master text styles</a:t>
             </a:r>
           </a:p>
@@ -2520,7 +2525,7 @@
           <a:p>
             <a:fld id="{343C6577-0C61-46BC-BF08-CE1B1D6A50DA}" type="datetimeFigureOut">
               <a:rPr lang="vi-VN" smtClean="0"/>
-              <a:t>08/04/2023</a:t>
+              <a:t>30/03/2024</a:t>
             </a:fld>
             <a:endParaRPr lang="vi-VN"/>
           </a:p>
@@ -2634,10 +2639,9 @@
           <a:lstStyle/>
           <a:p>
             <a:r>
-              <a:rPr lang="zh-TW" altLang="en-US" smtClean="0"/>
+              <a:rPr lang="zh-TW" altLang="en-US"/>
               <a:t>按一下以編輯母片標題樣式</a:t>
             </a:r>
-            <a:endParaRPr lang="zh-TW" altLang="en-US"/>
           </a:p>
         </p:txBody>
       </p:sp>
@@ -2668,38 +2672,37 @@
           <a:p>
             <a:pPr lvl="0"/>
             <a:r>
-              <a:rPr lang="zh-TW" altLang="en-US" smtClean="0"/>
+              <a:rPr lang="zh-TW" altLang="en-US"/>
               <a:t>按一下以編輯母片文字樣式</a:t>
             </a:r>
           </a:p>
           <a:p>
             <a:pPr lvl="1"/>
             <a:r>
-              <a:rPr lang="zh-TW" altLang="en-US" smtClean="0"/>
+              <a:rPr lang="zh-TW" altLang="en-US"/>
               <a:t>第二層</a:t>
             </a:r>
           </a:p>
           <a:p>
             <a:pPr lvl="2"/>
             <a:r>
-              <a:rPr lang="zh-TW" altLang="en-US" smtClean="0"/>
+              <a:rPr lang="zh-TW" altLang="en-US"/>
               <a:t>第三層</a:t>
             </a:r>
           </a:p>
           <a:p>
             <a:pPr lvl="3"/>
             <a:r>
-              <a:rPr lang="zh-TW" altLang="en-US" smtClean="0"/>
+              <a:rPr lang="zh-TW" altLang="en-US"/>
               <a:t>第四層</a:t>
             </a:r>
           </a:p>
           <a:p>
             <a:pPr lvl="4"/>
             <a:r>
-              <a:rPr lang="zh-TW" altLang="en-US" smtClean="0"/>
+              <a:rPr lang="zh-TW" altLang="en-US"/>
               <a:t>第五層</a:t>
             </a:r>
-            <a:endParaRPr lang="zh-TW" altLang="en-US"/>
           </a:p>
         </p:txBody>
       </p:sp>
@@ -2738,7 +2741,7 @@
           <a:p>
             <a:fld id="{343C6577-0C61-46BC-BF08-CE1B1D6A50DA}" type="datetimeFigureOut">
               <a:rPr lang="vi-VN" smtClean="0"/>
-              <a:t>08/04/2023</a:t>
+              <a:t>30/03/2024</a:t>
             </a:fld>
             <a:endParaRPr lang="vi-VN"/>
           </a:p>
@@ -3150,10 +3153,10 @@
                 <a:latin typeface="微軟正黑體" pitchFamily="34" charset="-120"/>
                 <a:ea typeface="微軟正黑體" pitchFamily="34" charset="-120"/>
               </a:rPr>
-              <a:t>歌</a:t>
-            </a:r>
-            <a:r>
-              <a:rPr lang="zh-TW" altLang="en-US" sz="7200" b="1" i="1" dirty="0">
+              <a:t>歌頌復活主</a:t>
+            </a:r>
+            <a:r>
+              <a:rPr lang="en-US" altLang="zh-TW" sz="7200" b="1" i="1" dirty="0">
                 <a:solidFill>
                   <a:srgbClr val="660033"/>
                 </a:solidFill>
@@ -3167,10 +3170,10 @@
                 <a:latin typeface="微軟正黑體" pitchFamily="34" charset="-120"/>
                 <a:ea typeface="微軟正黑體" pitchFamily="34" charset="-120"/>
               </a:rPr>
-              <a:t>頌復活</a:t>
-            </a:r>
-            <a:r>
-              <a:rPr lang="zh-TW" altLang="en-US" sz="7200" b="1" i="1" dirty="0">
+              <a:t> / </a:t>
+            </a:r>
+            <a:r>
+              <a:rPr lang="zh-CN" altLang="en-US" sz="7200" b="1" i="1" dirty="0">
                 <a:solidFill>
                   <a:srgbClr val="660033"/>
                 </a:solidFill>
@@ -3184,58 +3187,7 @@
                 <a:latin typeface="微軟正黑體" pitchFamily="34" charset="-120"/>
                 <a:ea typeface="微軟正黑體" pitchFamily="34" charset="-120"/>
               </a:rPr>
-              <a:t>主</a:t>
-            </a:r>
-            <a:r>
-              <a:rPr lang="en-US" altLang="zh-TW" sz="7200" b="1" i="1" dirty="0">
-                <a:solidFill>
-                  <a:srgbClr val="660033"/>
-                </a:solidFill>
-                <a:effectLst>
-                  <a:outerShdw blurRad="38100" dist="38100" dir="2700000" algn="tl">
-                    <a:srgbClr val="000000">
-                      <a:alpha val="43137"/>
-                    </a:srgbClr>
-                  </a:outerShdw>
-                </a:effectLst>
-                <a:latin typeface="微軟正黑體" pitchFamily="34" charset="-120"/>
-                <a:ea typeface="微軟正黑體" pitchFamily="34" charset="-120"/>
-              </a:rPr>
-              <a:t> / </a:t>
-            </a:r>
-            <a:r>
-              <a:rPr lang="zh-CN" altLang="en-US" sz="7200" b="1" i="1" dirty="0">
-                <a:solidFill>
-                  <a:srgbClr val="660033"/>
-                </a:solidFill>
-                <a:effectLst>
-                  <a:outerShdw blurRad="38100" dist="38100" dir="2700000" algn="tl">
-                    <a:srgbClr val="000000">
-                      <a:alpha val="43137"/>
-                    </a:srgbClr>
-                  </a:outerShdw>
-                </a:effectLst>
-                <a:latin typeface="微軟正黑體" pitchFamily="34" charset="-120"/>
-                <a:ea typeface="微軟正黑體" pitchFamily="34" charset="-120"/>
-              </a:rPr>
-              <a:t>歡樂主作</a:t>
-            </a:r>
-            <a:r>
-              <a:rPr lang="zh-CN" altLang="en-US" sz="7200" b="1" i="1" dirty="0">
-                <a:solidFill>
-                  <a:srgbClr val="660033"/>
-                </a:solidFill>
-                <a:effectLst>
-                  <a:outerShdw blurRad="38100" dist="38100" dir="2700000" algn="tl">
-                    <a:srgbClr val="000000">
-                      <a:alpha val="43137"/>
-                    </a:srgbClr>
-                  </a:outerShdw>
-                </a:effectLst>
-                <a:latin typeface="微軟正黑體" pitchFamily="34" charset="-120"/>
-                <a:ea typeface="微軟正黑體" pitchFamily="34" charset="-120"/>
-              </a:rPr>
-              <a:t>王</a:t>
+              <a:t>歡樂主作王</a:t>
             </a:r>
             <a:endParaRPr lang="zh-TW" altLang="en-US" sz="7200" b="1" i="1" dirty="0">
               <a:solidFill>
@@ -3363,17 +3315,7 @@
                 <a:latin typeface="Microsoft JhengHei" panose="020B0604030504040204" pitchFamily="34" charset="-120"/>
                 <a:ea typeface="Microsoft JhengHei" panose="020B0604030504040204" pitchFamily="34" charset="-120"/>
               </a:rPr>
-              <a:t>正 </a:t>
-            </a:r>
-            <a:r>
-              <a:rPr lang="en-US" altLang="zh-CN" sz="3733" b="1" dirty="0">
-                <a:solidFill>
-                  <a:srgbClr val="660033"/>
-                </a:solidFill>
-                <a:latin typeface="Microsoft JhengHei" panose="020B0604030504040204" pitchFamily="34" charset="-120"/>
-                <a:ea typeface="Microsoft JhengHei" panose="020B0604030504040204" pitchFamily="34" charset="-120"/>
-              </a:rPr>
-              <a:t>2</a:t>
+              <a:t>結尾</a:t>
             </a:r>
             <a:r>
               <a:rPr lang="en-US" sz="3733" b="1" dirty="0">
@@ -3457,17 +3399,7 @@
                 <a:latin typeface="微軟正黑體" pitchFamily="34" charset="-120"/>
                 <a:ea typeface="微軟正黑體" pitchFamily="34" charset="-120"/>
               </a:rPr>
-              <a:t>復</a:t>
-            </a:r>
-            <a:r>
-              <a:rPr lang="zh-TW" altLang="en-US" sz="6400" b="1" dirty="0">
-                <a:solidFill>
-                  <a:srgbClr val="660033"/>
-                </a:solidFill>
-                <a:latin typeface="微軟正黑體" pitchFamily="34" charset="-120"/>
-                <a:ea typeface="微軟正黑體" pitchFamily="34" charset="-120"/>
-              </a:rPr>
-              <a:t>活的主是主耶穌</a:t>
+              <a:t>復活的主是主耶穌</a:t>
             </a:r>
             <a:endParaRPr lang="en-US" altLang="zh-TW" sz="6400" b="1" dirty="0">
               <a:solidFill>
@@ -3489,17 +3421,7 @@
                 <a:latin typeface="微軟正黑體" pitchFamily="34" charset="-120"/>
                 <a:ea typeface="微軟正黑體" pitchFamily="34" charset="-120"/>
               </a:rPr>
-              <a:t>世上沒有祂的墳</a:t>
-            </a:r>
-            <a:r>
-              <a:rPr lang="zh-TW" altLang="en-US" sz="6400" b="1" dirty="0">
-                <a:solidFill>
-                  <a:srgbClr val="660033"/>
-                </a:solidFill>
-                <a:latin typeface="微軟正黑體" pitchFamily="34" charset="-120"/>
-                <a:ea typeface="微軟正黑體" pitchFamily="34" charset="-120"/>
-              </a:rPr>
-              <a:t>墓</a:t>
+              <a:t>世上沒有祂的墳墓</a:t>
             </a:r>
             <a:endParaRPr lang="en-US" altLang="zh-TW" sz="6400" b="1" dirty="0">
               <a:solidFill>
@@ -3552,7 +3474,7 @@
                 <a:latin typeface="Microsoft JhengHei" panose="020B0604030504040204" pitchFamily="34" charset="-120"/>
                 <a:ea typeface="Microsoft JhengHei" panose="020B0604030504040204" pitchFamily="34" charset="-120"/>
               </a:rPr>
-              <a:t>正</a:t>
+              <a:t>正歌</a:t>
             </a:r>
             <a:r>
               <a:rPr lang="en-US" sz="3733" b="1" dirty="0">
@@ -3704,7 +3626,7 @@
                 <a:latin typeface="Microsoft JhengHei" panose="020B0604030504040204" pitchFamily="34" charset="-120"/>
                 <a:ea typeface="Microsoft JhengHei" panose="020B0604030504040204" pitchFamily="34" charset="-120"/>
               </a:rPr>
-              <a:t>正</a:t>
+              <a:t>正歌</a:t>
             </a:r>
             <a:r>
               <a:rPr lang="en-US" sz="3733" b="1" dirty="0">
@@ -3863,7 +3785,7 @@
                 <a:latin typeface="Microsoft JhengHei" panose="020B0604030504040204" pitchFamily="34" charset="-120"/>
                 <a:ea typeface="Microsoft JhengHei" panose="020B0604030504040204" pitchFamily="34" charset="-120"/>
               </a:rPr>
-              <a:t>正</a:t>
+              <a:t>正歌</a:t>
             </a:r>
             <a:r>
               <a:rPr lang="en-US" sz="3733" b="1" dirty="0">
@@ -4015,7 +3937,7 @@
                 <a:latin typeface="Microsoft JhengHei" panose="020B0604030504040204" pitchFamily="34" charset="-120"/>
                 <a:ea typeface="Microsoft JhengHei" panose="020B0604030504040204" pitchFamily="34" charset="-120"/>
               </a:rPr>
-              <a:t>正</a:t>
+              <a:t>正歌</a:t>
             </a:r>
             <a:r>
               <a:rPr lang="en-US" sz="3733" b="1" dirty="0">
@@ -4099,47 +4021,27 @@
                 <a:latin typeface="微軟正黑體" pitchFamily="34" charset="-120"/>
                 <a:ea typeface="微軟正黑體" pitchFamily="34" charset="-120"/>
               </a:rPr>
-              <a:t>世上有哪一位</a:t>
-            </a:r>
-            <a:r>
-              <a:rPr lang="zh-TW" altLang="en-US" sz="6400" b="1" dirty="0">
+              <a:t>世上有哪一位神</a:t>
+            </a:r>
+            <a:r>
+              <a:rPr lang="en-US" altLang="zh-TW" sz="6400" b="1" dirty="0">
                 <a:solidFill>
                   <a:srgbClr val="660033"/>
                 </a:solidFill>
                 <a:latin typeface="微軟正黑體" pitchFamily="34" charset="-120"/>
                 <a:ea typeface="微軟正黑體" pitchFamily="34" charset="-120"/>
               </a:rPr>
-              <a:t>神</a:t>
-            </a:r>
-            <a:r>
-              <a:rPr lang="en-US" altLang="zh-TW" sz="6400" b="1" dirty="0">
+              <a:t>  </a:t>
+            </a:r>
+            <a:r>
+              <a:rPr lang="zh-TW" altLang="en-US" sz="6400" b="1" dirty="0">
                 <a:solidFill>
                   <a:srgbClr val="660033"/>
                 </a:solidFill>
                 <a:latin typeface="微軟正黑體" pitchFamily="34" charset="-120"/>
                 <a:ea typeface="微軟正黑體" pitchFamily="34" charset="-120"/>
               </a:rPr>
-              <a:t>  </a:t>
-            </a:r>
-            <a:r>
-              <a:rPr lang="zh-TW" altLang="en-US" sz="6400" b="1" dirty="0">
-                <a:solidFill>
-                  <a:srgbClr val="660033"/>
-                </a:solidFill>
-                <a:latin typeface="微軟正黑體" pitchFamily="34" charset="-120"/>
-                <a:ea typeface="微軟正黑體" pitchFamily="34" charset="-120"/>
-              </a:rPr>
-              <a:t>為</a:t>
-            </a:r>
-            <a:r>
-              <a:rPr lang="zh-TW" altLang="en-US" sz="6400" b="1" dirty="0">
-                <a:solidFill>
-                  <a:srgbClr val="660033"/>
-                </a:solidFill>
-                <a:latin typeface="微軟正黑體" pitchFamily="34" charset="-120"/>
-                <a:ea typeface="微軟正黑體" pitchFamily="34" charset="-120"/>
-              </a:rPr>
-              <a:t>世人而生</a:t>
+              <a:t>為世人而生</a:t>
             </a:r>
             <a:endParaRPr lang="en-US" altLang="zh-TW" sz="6400" b="1" dirty="0">
               <a:solidFill>
@@ -4161,47 +4063,27 @@
                 <a:latin typeface="微軟正黑體" pitchFamily="34" charset="-120"/>
                 <a:ea typeface="微軟正黑體" pitchFamily="34" charset="-120"/>
               </a:rPr>
-              <a:t>世上有哪一位</a:t>
-            </a:r>
-            <a:r>
-              <a:rPr lang="zh-TW" altLang="en-US" sz="6400" b="1" dirty="0">
+              <a:t>世上有哪一位神</a:t>
+            </a:r>
+            <a:r>
+              <a:rPr lang="en-US" altLang="zh-TW" sz="6400" b="1" dirty="0">
                 <a:solidFill>
                   <a:srgbClr val="660033"/>
                 </a:solidFill>
                 <a:latin typeface="微軟正黑體" pitchFamily="34" charset="-120"/>
                 <a:ea typeface="微軟正黑體" pitchFamily="34" charset="-120"/>
               </a:rPr>
-              <a:t>神</a:t>
-            </a:r>
-            <a:r>
-              <a:rPr lang="en-US" altLang="zh-TW" sz="6400" b="1" dirty="0">
+              <a:t>  </a:t>
+            </a:r>
+            <a:r>
+              <a:rPr lang="zh-TW" altLang="en-US" sz="6400" b="1" dirty="0">
                 <a:solidFill>
                   <a:srgbClr val="660033"/>
                 </a:solidFill>
                 <a:latin typeface="微軟正黑體" pitchFamily="34" charset="-120"/>
                 <a:ea typeface="微軟正黑體" pitchFamily="34" charset="-120"/>
               </a:rPr>
-              <a:t>  </a:t>
-            </a:r>
-            <a:r>
-              <a:rPr lang="zh-TW" altLang="en-US" sz="6400" b="1" dirty="0">
-                <a:solidFill>
-                  <a:srgbClr val="660033"/>
-                </a:solidFill>
-                <a:latin typeface="微軟正黑體" pitchFamily="34" charset="-120"/>
-                <a:ea typeface="微軟正黑體" pitchFamily="34" charset="-120"/>
-              </a:rPr>
-              <a:t>為</a:t>
-            </a:r>
-            <a:r>
-              <a:rPr lang="zh-TW" altLang="en-US" sz="6400" b="1" dirty="0">
-                <a:solidFill>
-                  <a:srgbClr val="660033"/>
-                </a:solidFill>
-                <a:latin typeface="微軟正黑體" pitchFamily="34" charset="-120"/>
-                <a:ea typeface="微軟正黑體" pitchFamily="34" charset="-120"/>
-              </a:rPr>
-              <a:t>世人而死</a:t>
+              <a:t>為世人而死</a:t>
             </a:r>
           </a:p>
         </p:txBody>
@@ -4247,7 +4129,7 @@
                 <a:latin typeface="Microsoft JhengHei" panose="020B0604030504040204" pitchFamily="34" charset="-120"/>
                 <a:ea typeface="Microsoft JhengHei" panose="020B0604030504040204" pitchFamily="34" charset="-120"/>
               </a:rPr>
-              <a:t>副</a:t>
+              <a:t>副歌</a:t>
             </a:r>
             <a:r>
               <a:rPr lang="en-US" sz="3733" b="1" dirty="0">
@@ -4331,47 +4213,27 @@
                 <a:latin typeface="微軟正黑體" pitchFamily="34" charset="-120"/>
                 <a:ea typeface="微軟正黑體" pitchFamily="34" charset="-120"/>
               </a:rPr>
-              <a:t>世上有哪一位</a:t>
-            </a:r>
-            <a:r>
-              <a:rPr lang="zh-TW" altLang="en-US" sz="6400" b="1" dirty="0">
+              <a:t>世上有哪一位神</a:t>
+            </a:r>
+            <a:r>
+              <a:rPr lang="en-US" altLang="zh-TW" sz="6400" b="1" dirty="0">
                 <a:solidFill>
                   <a:srgbClr val="660033"/>
                 </a:solidFill>
                 <a:latin typeface="微軟正黑體" pitchFamily="34" charset="-120"/>
                 <a:ea typeface="微軟正黑體" pitchFamily="34" charset="-120"/>
               </a:rPr>
-              <a:t>神</a:t>
-            </a:r>
-            <a:r>
-              <a:rPr lang="en-US" altLang="zh-TW" sz="6400" b="1" dirty="0">
+              <a:t>  </a:t>
+            </a:r>
+            <a:r>
+              <a:rPr lang="zh-TW" altLang="en-US" sz="6400" b="1" dirty="0">
                 <a:solidFill>
                   <a:srgbClr val="660033"/>
                 </a:solidFill>
                 <a:latin typeface="微軟正黑體" pitchFamily="34" charset="-120"/>
                 <a:ea typeface="微軟正黑體" pitchFamily="34" charset="-120"/>
               </a:rPr>
-              <a:t>  </a:t>
-            </a:r>
-            <a:r>
-              <a:rPr lang="zh-TW" altLang="en-US" sz="6400" b="1" dirty="0">
-                <a:solidFill>
-                  <a:srgbClr val="660033"/>
-                </a:solidFill>
-                <a:latin typeface="微軟正黑體" pitchFamily="34" charset="-120"/>
-                <a:ea typeface="微軟正黑體" pitchFamily="34" charset="-120"/>
-              </a:rPr>
-              <a:t>為</a:t>
-            </a:r>
-            <a:r>
-              <a:rPr lang="zh-TW" altLang="en-US" sz="6400" b="1" dirty="0">
-                <a:solidFill>
-                  <a:srgbClr val="660033"/>
-                </a:solidFill>
-                <a:latin typeface="微軟正黑體" pitchFamily="34" charset="-120"/>
-                <a:ea typeface="微軟正黑體" pitchFamily="34" charset="-120"/>
-              </a:rPr>
-              <a:t>世人復活</a:t>
+              <a:t>為世人復活</a:t>
             </a:r>
             <a:endParaRPr lang="en-US" altLang="zh-TW" sz="6400" b="1" dirty="0">
               <a:solidFill>
@@ -4393,47 +4255,27 @@
                 <a:latin typeface="微軟正黑體" pitchFamily="34" charset="-120"/>
                 <a:ea typeface="微軟正黑體" pitchFamily="34" charset="-120"/>
               </a:rPr>
-              <a:t>世上有哪一位救</a:t>
-            </a:r>
-            <a:r>
-              <a:rPr lang="zh-TW" altLang="en-US" sz="6400" b="1" dirty="0">
+              <a:t>世上有哪一位救主</a:t>
+            </a:r>
+            <a:r>
+              <a:rPr lang="en-US" altLang="zh-TW" sz="6400" b="1" dirty="0">
                 <a:solidFill>
                   <a:srgbClr val="660033"/>
                 </a:solidFill>
                 <a:latin typeface="微軟正黑體" pitchFamily="34" charset="-120"/>
                 <a:ea typeface="微軟正黑體" pitchFamily="34" charset="-120"/>
               </a:rPr>
-              <a:t>主</a:t>
-            </a:r>
-            <a:r>
-              <a:rPr lang="en-US" altLang="zh-TW" sz="6400" b="1" dirty="0">
+              <a:t>  </a:t>
+            </a:r>
+            <a:r>
+              <a:rPr lang="zh-TW" altLang="en-US" sz="6400" b="1" dirty="0">
                 <a:solidFill>
                   <a:srgbClr val="660033"/>
                 </a:solidFill>
                 <a:latin typeface="微軟正黑體" pitchFamily="34" charset="-120"/>
                 <a:ea typeface="微軟正黑體" pitchFamily="34" charset="-120"/>
               </a:rPr>
-              <a:t>  </a:t>
-            </a:r>
-            <a:r>
-              <a:rPr lang="zh-TW" altLang="en-US" sz="6400" b="1" dirty="0">
-                <a:solidFill>
-                  <a:srgbClr val="660033"/>
-                </a:solidFill>
-                <a:latin typeface="微軟正黑體" pitchFamily="34" charset="-120"/>
-                <a:ea typeface="微軟正黑體" pitchFamily="34" charset="-120"/>
-              </a:rPr>
-              <a:t>今</a:t>
-            </a:r>
-            <a:r>
-              <a:rPr lang="zh-TW" altLang="en-US" sz="6400" b="1" dirty="0">
-                <a:solidFill>
-                  <a:srgbClr val="660033"/>
-                </a:solidFill>
-                <a:latin typeface="微軟正黑體" pitchFamily="34" charset="-120"/>
-                <a:ea typeface="微軟正黑體" pitchFamily="34" charset="-120"/>
-              </a:rPr>
-              <a:t>天仍活著</a:t>
+              <a:t>今天仍活著</a:t>
             </a:r>
           </a:p>
         </p:txBody>
@@ -4479,7 +4321,7 @@
                 <a:latin typeface="Microsoft JhengHei" panose="020B0604030504040204" pitchFamily="34" charset="-120"/>
                 <a:ea typeface="Microsoft JhengHei" panose="020B0604030504040204" pitchFamily="34" charset="-120"/>
               </a:rPr>
-              <a:t>副</a:t>
+              <a:t>副歌</a:t>
             </a:r>
             <a:r>
               <a:rPr lang="en-US" sz="3733" b="1" dirty="0">
@@ -4563,37 +4405,7 @@
                 <a:latin typeface="微軟正黑體" pitchFamily="34" charset="-120"/>
                 <a:ea typeface="微軟正黑體" pitchFamily="34" charset="-120"/>
               </a:rPr>
-              <a:t>因祂來到 </a:t>
-            </a:r>
-            <a:r>
-              <a:rPr lang="zh-TW" altLang="en-US" sz="6400" b="1" dirty="0">
-                <a:solidFill>
-                  <a:srgbClr val="660033"/>
-                </a:solidFill>
-                <a:latin typeface="微軟正黑體" pitchFamily="34" charset="-120"/>
-                <a:ea typeface="微軟正黑體" pitchFamily="34" charset="-120"/>
-              </a:rPr>
-              <a:t> 全</a:t>
-            </a:r>
-            <a:r>
-              <a:rPr lang="zh-TW" altLang="en-US" sz="6400" b="1" dirty="0">
-                <a:solidFill>
-                  <a:srgbClr val="660033"/>
-                </a:solidFill>
-                <a:latin typeface="微軟正黑體" pitchFamily="34" charset="-120"/>
-                <a:ea typeface="微軟正黑體" pitchFamily="34" charset="-120"/>
-              </a:rPr>
-              <a:t>能神作</a:t>
-            </a:r>
-            <a:r>
-              <a:rPr lang="zh-TW" altLang="en-US" sz="6400" b="1" dirty="0">
-                <a:solidFill>
-                  <a:srgbClr val="660033"/>
-                </a:solidFill>
-                <a:latin typeface="微軟正黑體" pitchFamily="34" charset="-120"/>
-                <a:ea typeface="微軟正黑體" pitchFamily="34" charset="-120"/>
-              </a:rPr>
-              <a:t>王</a:t>
+              <a:t>因祂來到  全能神作王</a:t>
             </a:r>
             <a:endParaRPr lang="en-US" altLang="zh-TW" sz="6400" b="1" dirty="0">
               <a:solidFill>
@@ -4615,37 +4427,7 @@
                 <a:latin typeface="微軟正黑體" pitchFamily="34" charset="-120"/>
                 <a:ea typeface="微軟正黑體" pitchFamily="34" charset="-120"/>
               </a:rPr>
-              <a:t>萬</a:t>
-            </a:r>
-            <a:r>
-              <a:rPr lang="zh-TW" altLang="en-US" sz="6400" b="1" dirty="0">
-                <a:solidFill>
-                  <a:srgbClr val="660033"/>
-                </a:solidFill>
-                <a:latin typeface="微軟正黑體" pitchFamily="34" charset="-120"/>
-                <a:ea typeface="微軟正黑體" pitchFamily="34" charset="-120"/>
-              </a:rPr>
-              <a:t>膝要跪拜 </a:t>
-            </a:r>
-            <a:r>
-              <a:rPr lang="zh-TW" altLang="en-US" sz="6400" b="1" dirty="0">
-                <a:solidFill>
-                  <a:srgbClr val="660033"/>
-                </a:solidFill>
-                <a:latin typeface="微軟正黑體" pitchFamily="34" charset="-120"/>
-                <a:ea typeface="微軟正黑體" pitchFamily="34" charset="-120"/>
-              </a:rPr>
-              <a:t> 萬</a:t>
-            </a:r>
-            <a:r>
-              <a:rPr lang="zh-TW" altLang="en-US" sz="6400" b="1" dirty="0">
-                <a:solidFill>
-                  <a:srgbClr val="660033"/>
-                </a:solidFill>
-                <a:latin typeface="微軟正黑體" pitchFamily="34" charset="-120"/>
-                <a:ea typeface="微軟正黑體" pitchFamily="34" charset="-120"/>
-              </a:rPr>
-              <a:t>口頌揚</a:t>
+              <a:t>萬膝要跪拜  萬口頌揚</a:t>
             </a:r>
           </a:p>
         </p:txBody>
@@ -4691,7 +4473,7 @@
                 <a:latin typeface="Microsoft JhengHei" panose="020B0604030504040204" pitchFamily="34" charset="-120"/>
                 <a:ea typeface="Microsoft JhengHei" panose="020B0604030504040204" pitchFamily="34" charset="-120"/>
               </a:rPr>
-              <a:t>正 </a:t>
+              <a:t>正歌 </a:t>
             </a:r>
             <a:r>
               <a:rPr lang="en-US" altLang="zh-CN" sz="3733" b="1" dirty="0">
@@ -4785,17 +4567,7 @@
                 <a:latin typeface="微軟正黑體" pitchFamily="34" charset="-120"/>
                 <a:ea typeface="微軟正黑體" pitchFamily="34" charset="-120"/>
               </a:rPr>
-              <a:t>祂要按祂的信實審判萬</a:t>
-            </a:r>
-            <a:r>
-              <a:rPr lang="zh-TW" altLang="en-US" sz="6400" b="1" dirty="0">
-                <a:solidFill>
-                  <a:srgbClr val="660033"/>
-                </a:solidFill>
-                <a:latin typeface="微軟正黑體" pitchFamily="34" charset="-120"/>
-                <a:ea typeface="微軟正黑體" pitchFamily="34" charset="-120"/>
-              </a:rPr>
-              <a:t>民</a:t>
+              <a:t>祂要按祂的信實審判萬民</a:t>
             </a:r>
             <a:endParaRPr lang="en-US" altLang="zh-TW" sz="6400" b="1" dirty="0">
               <a:solidFill>
@@ -4817,17 +4589,7 @@
                 <a:latin typeface="微軟正黑體" pitchFamily="34" charset="-120"/>
                 <a:ea typeface="微軟正黑體" pitchFamily="34" charset="-120"/>
               </a:rPr>
-              <a:t>祂</a:t>
-            </a:r>
-            <a:r>
-              <a:rPr lang="zh-TW" altLang="en-US" sz="6400" b="1" dirty="0">
-                <a:solidFill>
-                  <a:srgbClr val="660033"/>
-                </a:solidFill>
-                <a:latin typeface="微軟正黑體" pitchFamily="34" charset="-120"/>
-                <a:ea typeface="微軟正黑體" pitchFamily="34" charset="-120"/>
-              </a:rPr>
-              <a:t>要按公義審判萬邦</a:t>
+              <a:t>祂要按公義審判萬邦</a:t>
             </a:r>
           </a:p>
         </p:txBody>
@@ -4873,7 +4635,7 @@
                 <a:latin typeface="Microsoft JhengHei" panose="020B0604030504040204" pitchFamily="34" charset="-120"/>
                 <a:ea typeface="Microsoft JhengHei" panose="020B0604030504040204" pitchFamily="34" charset="-120"/>
               </a:rPr>
-              <a:t>正 </a:t>
+              <a:t>正歌 </a:t>
             </a:r>
             <a:r>
               <a:rPr lang="en-US" altLang="zh-CN" sz="3733" b="1" dirty="0">
